--- a/Viernes-12/S01_Viernes-12_3_Reel_Viernes-sin-resolver_9x16.pptx
+++ b/Viernes-12/S01_Viernes-12_3_Reel_Viernes-sin-resolver_9x16.pptx
@@ -3513,7 +3513,7 @@
       <p:grpSpPr/>
       <p:pic>
         <p:nvPicPr>
-          <p:cNvPr id="2" name="Picture 1" descr="oficina.png"/>
+          <p:cNvPr id="2" name="Picture 1" descr="reloj.png"/>
           <p:cNvPicPr>
             <a:picLocks noChangeAspect="1"/>
           </p:cNvPicPr>
@@ -3527,8 +3527,8 @@
         </p:blipFill>
         <p:spPr>
           <a:xfrm>
-            <a:off x="-1371600" y="0"/>
-            <a:ext cx="10972800" cy="14630400"/>
+            <a:off x="0" y="-57150"/>
+            <a:ext cx="8229600" cy="14744700"/>
           </a:xfrm>
           <a:prstGeom prst="rect">
             <a:avLst/>
@@ -3645,7 +3645,7 @@
         </p:nvSpPr>
         <p:spPr>
           <a:xfrm>
-            <a:off x="777240" y="3424936"/>
+            <a:off x="777240" y="4282186"/>
             <a:ext cx="1371600" cy="146304"/>
           </a:xfrm>
           <a:prstGeom prst="rect">
@@ -3689,8 +3689,8 @@
         </p:nvSpPr>
         <p:spPr>
           <a:xfrm>
-            <a:off x="777240" y="3882136"/>
-            <a:ext cx="6675120" cy="6134608"/>
+            <a:off x="777240" y="4739386"/>
+            <a:ext cx="6675120" cy="4420108"/>
           </a:xfrm>
           <a:prstGeom prst="rect">
             <a:avLst/>
@@ -3709,13 +3709,13 @@
               </a:lnSpc>
             </a:pPr>
             <a:r>
-              <a:rPr sz="9200" b="1">
+              <a:rPr sz="6500" b="1">
                 <a:solidFill>
                   <a:srgbClr val="FFFFFF"/>
                 </a:solidFill>
                 <a:latin typeface="Inter"/>
               </a:rPr>
-              <a:t>La semana que viene cambia.</a:t>
+              <a:t>Resuélvelo ahora en notaly.com.ve</a:t>
             </a:r>
           </a:p>
         </p:txBody>
@@ -3728,7 +3728,7 @@
         </p:nvSpPr>
         <p:spPr>
           <a:xfrm>
-            <a:off x="777240" y="10016744"/>
+            <a:off x="777240" y="9159494"/>
             <a:ext cx="6675120" cy="1118108"/>
           </a:xfrm>
           <a:prstGeom prst="rect">
@@ -3754,7 +3754,7 @@
                 </a:solidFill>
                 <a:latin typeface="Inter"/>
               </a:rPr>
-              <a:t>Síguenos.</a:t>
+              <a:t>Early access.</a:t>
             </a:r>
           </a:p>
         </p:txBody>

--- a/Viernes-12/S01_Viernes-12_3_Reel_Viernes-sin-resolver_9x16.pptx
+++ b/Viernes-12/S01_Viernes-12_3_Reel_Viernes-sin-resolver_9x16.pptx
@@ -3513,7 +3513,7 @@
       <p:grpSpPr/>
       <p:pic>
         <p:nvPicPr>
-          <p:cNvPr id="2" name="Picture 1" descr="reloj.png"/>
+          <p:cNvPr id="2" name="Picture 1" descr="firma.png"/>
           <p:cNvPicPr>
             <a:picLocks noChangeAspect="1"/>
           </p:cNvPicPr>
@@ -3645,7 +3645,7 @@
         </p:nvSpPr>
         <p:spPr>
           <a:xfrm>
-            <a:off x="777240" y="4282186"/>
+            <a:off x="777240" y="4345686"/>
             <a:ext cx="1371600" cy="146304"/>
           </a:xfrm>
           <a:prstGeom prst="rect">
@@ -3689,8 +3689,8 @@
         </p:nvSpPr>
         <p:spPr>
           <a:xfrm>
-            <a:off x="777240" y="4739386"/>
-            <a:ext cx="6675120" cy="4420108"/>
+            <a:off x="777240" y="4802886"/>
+            <a:ext cx="6675120" cy="4293108"/>
           </a:xfrm>
           <a:prstGeom prst="rect">
             <a:avLst/>
@@ -3709,13 +3709,13 @@
               </a:lnSpc>
             </a:pPr>
             <a:r>
-              <a:rPr sz="6500" b="1">
+              <a:rPr sz="8400" b="1">
                 <a:solidFill>
                   <a:srgbClr val="FFFFFF"/>
                 </a:solidFill>
                 <a:latin typeface="Inter"/>
               </a:rPr>
-              <a:t>Resuélvelo ahora en notaly.com.ve</a:t>
+              <a:t>Resuélvelo en línea.</a:t>
             </a:r>
           </a:p>
         </p:txBody>
@@ -3728,7 +3728,7 @@
         </p:nvSpPr>
         <p:spPr>
           <a:xfrm>
-            <a:off x="777240" y="9159494"/>
+            <a:off x="777240" y="9095994"/>
             <a:ext cx="6675120" cy="1118108"/>
           </a:xfrm>
           <a:prstGeom prst="rect">
@@ -3754,7 +3754,7 @@
                 </a:solidFill>
                 <a:latin typeface="Inter"/>
               </a:rPr>
-              <a:t>Early access.</a:t>
+              <a:t>notaly.com.ve</a:t>
             </a:r>
           </a:p>
         </p:txBody>

--- a/Viernes-12/S01_Viernes-12_3_Reel_Viernes-sin-resolver_9x16.pptx
+++ b/Viernes-12/S01_Viernes-12_3_Reel_Viernes-sin-resolver_9x16.pptx
@@ -3100,7 +3100,7 @@
       <p:grpSpPr/>
       <p:pic>
         <p:nvPicPr>
-          <p:cNvPr id="2" name="Picture 1" descr="firma.png"/>
+          <p:cNvPr id="2" name="Picture 1" descr="oficina.png"/>
           <p:cNvPicPr>
             <a:picLocks noChangeAspect="1"/>
           </p:cNvPicPr>
@@ -3114,8 +3114,8 @@
         </p:blipFill>
         <p:spPr>
           <a:xfrm>
-            <a:off x="0" y="-57150"/>
-            <a:ext cx="8229600" cy="14744700"/>
+            <a:off x="-1371600" y="0"/>
+            <a:ext cx="10972800" cy="14630400"/>
           </a:xfrm>
           <a:prstGeom prst="rect">
             <a:avLst/>
